--- a/builder/assets/reference-pages/confidence-band.pptx
+++ b/builder/assets/reference-pages/confidence-band.pptx
@@ -1099,7 +1099,7 @@
                   <a:srgbClr val="15375F"/>
                 </a:solidFill>
               </a:rPr>
-              <a:t>中心估计总体上行，但2025年四季度和2026年三季度的不确定性明显扩大</a:t>
+              <a:t>The center estimate is generally upward, but2025fourth quarter of the year and2026Uncertainty expanded significantly in the third quarter of 2020</a:t>
             </a:r>
           </a:p>
         </p:txBody>
@@ -1151,7 +1151,7 @@
                   <a:srgbClr val="697386"/>
                 </a:solidFill>
               </a:rPr>
-              <a:t>合成示例数据，非真实客户数据</a:t>
+              <a:t>Synthetic sample data, not real customer data</a:t>
             </a:r>
           </a:p>
         </p:txBody>
@@ -1236,7 +1236,7 @@
                   <a:srgbClr val="15375F"/>
                 </a:solidFill>
               </a:rPr>
-              <a:t>匿名服务完成率（%）</a:t>
+              <a:t>Anonymous service completion rate (%)</a:t>
             </a:r>
           </a:p>
         </p:txBody>
@@ -1288,7 +1288,7 @@
                   <a:srgbClr val="2F6FB2"/>
                 </a:solidFill>
               </a:rPr>
-              <a:t>95% bootstrap置信区间</a:t>
+              <a:t>95% bootstrapconfidence interval</a:t>
             </a:r>
           </a:p>
         </p:txBody>
@@ -1340,7 +1340,7 @@
                   <a:srgbClr val="697386"/>
                 </a:solidFill>
               </a:rPr>
-              <a:t>样本：当季匿名有效样本</a:t>
+              <a:t>Sample: Anonymous valid sample of the current season</a:t>
             </a:r>
           </a:p>
         </p:txBody>
@@ -2426,7 +2426,7 @@
                   <a:srgbClr val="E8872D"/>
                 </a:solidFill>
               </a:rPr>
-              <a:t>关注阈值 6%</a:t>
+              <a:t>attention threshold 6%</a:t>
             </a:r>
           </a:p>
         </p:txBody>
@@ -3822,7 +3822,7 @@
                   <a:srgbClr val="697386"/>
                 </a:solidFill>
               </a:rPr>
-              <a:t>实线与圆点：中心估计　半透明带：95% bootstrap置信区间　虚线：阈值</a:t>
+              <a:t>Solid line vs. dot: center estimate　Translucent tape:95% bootstrapconfidence interval　Dashed line: threshold</a:t>
             </a:r>
           </a:p>
         </p:txBody>
@@ -3907,7 +3907,7 @@
                   <a:srgbClr val="15375F"/>
                 </a:solidFill>
               </a:rPr>
-              <a:t>读图与口径</a:t>
+              <a:t>Reading pictures and caliber</a:t>
             </a:r>
           </a:p>
         </p:txBody>
@@ -3959,7 +3959,7 @@
                   <a:srgbClr val="172033"/>
                 </a:solidFill>
               </a:rPr>
-              <a:t>1. 2025年四季度区间宽度扩大至1.6个百分点</a:t>
+              <a:t>1. 2025In the fourth quarter of the year, the range width expanded to1.6percentage points</a:t>
             </a:r>
           </a:p>
         </p:txBody>
@@ -4011,7 +4011,7 @@
                   <a:srgbClr val="172033"/>
                 </a:solidFill>
               </a:rPr>
-              <a:t>2. 2026年二季度区间首次整体高于6.0%</a:t>
+              <a:t>2. 2026For the first time in the second quarter of the year, the range was overall higher than6.0%</a:t>
             </a:r>
           </a:p>
         </p:txBody>
@@ -4063,7 +4063,7 @@
                   <a:srgbClr val="172033"/>
                 </a:solidFill>
               </a:rPr>
-              <a:t>3. 2026年三季度回落且区间变宽，方向不稳</a:t>
+              <a:t>3. 2026It fell back in the third quarter of the year and the range widened, and the direction was unstable.</a:t>
             </a:r>
           </a:p>
         </p:txBody>
@@ -4115,7 +4115,7 @@
                   <a:srgbClr val="697386"/>
                 </a:solidFill>
               </a:rPr>
-              <a:t>区间：重复抽样覆盖，不是单期概率</a:t>
+              <a:t>Interval: repeated sampling coverage, not single-period probability</a:t>
             </a:r>
           </a:p>
           <a:p xmlns:a="http://schemas.openxmlformats.org/drawingml/2006/main">
@@ -4132,7 +4132,7 @@
                   <a:srgbClr val="697386"/>
                 </a:solidFill>
               </a:rPr>
-              <a:t>估计：季度比例；重抽样2000次</a:t>
+              <a:t>Estimates: quarterly proportions; resampling2000times</a:t>
             </a:r>
           </a:p>
           <a:p xmlns:a="http://schemas.openxmlformats.org/drawingml/2006/main">
@@ -4149,7 +4149,7 @@
                   <a:srgbClr val="697386"/>
                 </a:solidFill>
               </a:rPr>
-              <a:t>总体：目标总体为同口径服务申请</a:t>
+              <a:t>Overall: The target is to apply for services of the same caliber overall</a:t>
             </a:r>
           </a:p>
         </p:txBody>
@@ -4201,7 +4201,7 @@
                   <a:srgbClr val="E8872D"/>
                 </a:solidFill>
               </a:rPr>
-              <a:t>阈值仅作业务关注线，不代表统计显著性或因果界限</a:t>
+              <a:t>The threshold is only a line of business concern and does not represent statistical significance or causal limits.</a:t>
             </a:r>
           </a:p>
         </p:txBody>
@@ -4253,7 +4253,7 @@
                   <a:srgbClr val="E8872D"/>
                 </a:solidFill>
               </a:rPr>
-              <a:t>来源：匿名合成季度样本，期间为2025年一季度至2026年四季度；合成示例数据，非真实客户数据</a:t>
+              <a:t>Source: Anonymous synthetic quarterly sample, period2025to the first quarter of the year2026Fourth quarter of the year; synthetic sample data, not real customer data</a:t>
             </a:r>
           </a:p>
         </p:txBody>
@@ -4309,7 +4309,7 @@
                   <a:srgbClr val="15375F"/>
                 </a:solidFill>
               </a:rPr>
-              <a:t>在区间明显收窄并持续高于关注线前，不宜把单季上行解释为稳定改善</a:t>
+              <a:t>Before the range narrows significantly and continues to be above the concern line, it is not appropriate to interpret the single-quarter upward trend as a stable improvement.</a:t>
             </a:r>
           </a:p>
         </p:txBody>
